--- a/MercariPriceSuggestion/reports/Big20_3조_세미프로젝트_발표자료_04.pptx
+++ b/MercariPriceSuggestion/reports/Big20_3조_세미프로젝트_발표자료_04.pptx
@@ -10822,7 +10822,7 @@
       </p:pic>
       <p:pic>
         <p:nvPicPr>
-          <p:cNvPr id="35" name="Image 33" descr="preencoded.png"/>
+          <p:cNvPr id="39" name="Image 37" descr="preencoded.png"/>
           <p:cNvPicPr>
             <a:picLocks noChangeAspect="1"/>
           </p:cNvPicPr>
@@ -10830,102 +10830,6 @@
         </p:nvPicPr>
         <p:blipFill>
           <a:blip r:embed="rId36"/>
-          <a:stretch>
-            <a:fillRect/>
-          </a:stretch>
-        </p:blipFill>
-        <p:spPr>
-          <a:xfrm>
-            <a:off x="5524649" y="4895850"/>
-            <a:ext cx="381000" cy="152400"/>
-          </a:xfrm>
-          <a:prstGeom prst="rect">
-            <a:avLst/>
-          </a:prstGeom>
-        </p:spPr>
-      </p:pic>
-      <p:pic>
-        <p:nvPicPr>
-          <p:cNvPr id="36" name="Image 34" descr="preencoded.png"/>
-          <p:cNvPicPr>
-            <a:picLocks noChangeAspect="1"/>
-          </p:cNvPicPr>
-          <p:nvPr/>
-        </p:nvPicPr>
-        <p:blipFill>
-          <a:blip r:embed="rId37"/>
-          <a:stretch>
-            <a:fillRect/>
-          </a:stretch>
-        </p:blipFill>
-        <p:spPr>
-          <a:xfrm>
-            <a:off x="6597253" y="4895850"/>
-            <a:ext cx="381000" cy="152400"/>
-          </a:xfrm>
-          <a:prstGeom prst="rect">
-            <a:avLst/>
-          </a:prstGeom>
-        </p:spPr>
-      </p:pic>
-      <p:pic>
-        <p:nvPicPr>
-          <p:cNvPr id="37" name="Image 35" descr="preencoded.png"/>
-          <p:cNvPicPr>
-            <a:picLocks noChangeAspect="1"/>
-          </p:cNvPicPr>
-          <p:nvPr/>
-        </p:nvPicPr>
-        <p:blipFill>
-          <a:blip r:embed="rId38"/>
-          <a:stretch>
-            <a:fillRect/>
-          </a:stretch>
-        </p:blipFill>
-        <p:spPr>
-          <a:xfrm>
-            <a:off x="7650659" y="4895850"/>
-            <a:ext cx="381000" cy="152400"/>
-          </a:xfrm>
-          <a:prstGeom prst="rect">
-            <a:avLst/>
-          </a:prstGeom>
-        </p:spPr>
-      </p:pic>
-      <p:pic>
-        <p:nvPicPr>
-          <p:cNvPr id="38" name="Image 36" descr="preencoded.png"/>
-          <p:cNvPicPr>
-            <a:picLocks noChangeAspect="1"/>
-          </p:cNvPicPr>
-          <p:nvPr/>
-        </p:nvPicPr>
-        <p:blipFill>
-          <a:blip r:embed="rId39"/>
-          <a:stretch>
-            <a:fillRect/>
-          </a:stretch>
-        </p:blipFill>
-        <p:spPr>
-          <a:xfrm>
-            <a:off x="8665964" y="4895850"/>
-            <a:ext cx="381000" cy="152400"/>
-          </a:xfrm>
-          <a:prstGeom prst="rect">
-            <a:avLst/>
-          </a:prstGeom>
-        </p:spPr>
-      </p:pic>
-      <p:pic>
-        <p:nvPicPr>
-          <p:cNvPr id="39" name="Image 37" descr="preencoded.png"/>
-          <p:cNvPicPr>
-            <a:picLocks noChangeAspect="1"/>
-          </p:cNvPicPr>
-          <p:nvPr/>
-        </p:nvPicPr>
-        <p:blipFill>
-          <a:blip r:embed="rId40"/>
           <a:stretch>
             <a:fillRect/>
           </a:stretch>
@@ -10949,7 +10853,7 @@
           <p:nvPr/>
         </p:nvPicPr>
         <p:blipFill>
-          <a:blip r:embed="rId41"/>
+          <a:blip r:embed="rId37"/>
           <a:stretch>
             <a:fillRect/>
           </a:stretch>
@@ -10973,7 +10877,7 @@
           <p:nvPr/>
         </p:nvPicPr>
         <p:blipFill>
-          <a:blip r:embed="rId42"/>
+          <a:blip r:embed="rId38"/>
           <a:stretch>
             <a:fillRect/>
           </a:stretch>
@@ -10997,7 +10901,7 @@
           <p:nvPr/>
         </p:nvPicPr>
         <p:blipFill>
-          <a:blip r:embed="rId43"/>
+          <a:blip r:embed="rId39"/>
           <a:stretch>
             <a:fillRect/>
           </a:stretch>
@@ -11021,7 +10925,7 @@
           <p:nvPr/>
         </p:nvPicPr>
         <p:blipFill>
-          <a:blip r:embed="rId44"/>
+          <a:blip r:embed="rId40"/>
           <a:stretch>
             <a:fillRect/>
           </a:stretch>
@@ -11045,7 +10949,7 @@
           <p:nvPr/>
         </p:nvPicPr>
         <p:blipFill>
-          <a:blip r:embed="rId45"/>
+          <a:blip r:embed="rId41"/>
           <a:stretch>
             <a:fillRect/>
           </a:stretch>
@@ -11069,7 +10973,7 @@
           <p:nvPr/>
         </p:nvPicPr>
         <p:blipFill>
-          <a:blip r:embed="rId46"/>
+          <a:blip r:embed="rId42"/>
           <a:stretch>
             <a:fillRect/>
           </a:stretch>
@@ -11093,7 +10997,7 @@
           <p:nvPr/>
         </p:nvPicPr>
         <p:blipFill>
-          <a:blip r:embed="rId46"/>
+          <a:blip r:embed="rId42"/>
           <a:stretch>
             <a:fillRect/>
           </a:stretch>
@@ -11117,7 +11021,7 @@
           <p:nvPr/>
         </p:nvPicPr>
         <p:blipFill>
-          <a:blip r:embed="rId46"/>
+          <a:blip r:embed="rId42"/>
           <a:stretch>
             <a:fillRect/>
           </a:stretch>
@@ -11141,7 +11045,7 @@
           <p:nvPr/>
         </p:nvPicPr>
         <p:blipFill>
-          <a:blip r:embed="rId47"/>
+          <a:blip r:embed="rId43"/>
           <a:stretch>
             <a:fillRect/>
           </a:stretch>
@@ -11165,7 +11069,7 @@
           <p:nvPr/>
         </p:nvPicPr>
         <p:blipFill>
-          <a:blip r:embed="rId48"/>
+          <a:blip r:embed="rId44"/>
           <a:stretch>
             <a:fillRect/>
           </a:stretch>
@@ -12243,48 +12147,6 @@
       </p:sp>
       <p:sp>
         <p:nvSpPr>
-          <p:cNvPr id="75" name="Text 25"/>
-          <p:cNvSpPr/>
-          <p:nvPr/>
-        </p:nvSpPr>
-        <p:spPr>
-          <a:xfrm>
-            <a:off x="5166271" y="4057650"/>
-            <a:ext cx="4175820" cy="190500"/>
-          </a:xfrm>
-          <a:prstGeom prst="rect">
-            <a:avLst/>
-          </a:prstGeom>
-          <a:noFill/>
-          <a:ln/>
-        </p:spPr>
-        <p:txBody>
-          <a:bodyPr vert="horz" wrap="square" lIns="0" tIns="0" rIns="0" bIns="0" rtlCol="0" anchor="t"/>
-          <a:lstStyle/>
-          <a:p>
-            <a:pPr marL="0" indent="0">
-              <a:lnSpc>
-                <a:spcPts val="1500"/>
-              </a:lnSpc>
-              <a:buNone/>
-            </a:pPr>
-            <a:r>
-              <a:rPr lang="en-US" sz="1050" b="1" dirty="0">
-                <a:solidFill>
-                  <a:srgbClr val="333333"/>
-                </a:solidFill>
-                <a:latin typeface="Noto Sans KR" pitchFamily="34" charset="0"/>
-                <a:ea typeface="Noto Sans KR" pitchFamily="34" charset="-122"/>
-                <a:cs typeface="Noto Sans KR" pitchFamily="34" charset="-120"/>
-              </a:rPr>
-              <a:t>모델별 성능 비교 (RMSLE)</a:t>
-            </a:r>
-            <a:endParaRPr lang="en-US" sz="1050" dirty="0"/>
-          </a:p>
-        </p:txBody>
-      </p:sp>
-      <p:sp>
-        <p:nvSpPr>
           <p:cNvPr id="76" name="Text 26"/>
           <p:cNvSpPr/>
           <p:nvPr/>
@@ -12319,49 +12181,7 @@
                 <a:ea typeface="Noto Sans KR" pitchFamily="34" charset="-122"/>
                 <a:cs typeface="Noto Sans KR" pitchFamily="34" charset="-120"/>
               </a:rPr>
-              <a:t>0.45</a:t>
-            </a:r>
-            <a:endParaRPr lang="en-US" sz="900" dirty="0"/>
-          </a:p>
-        </p:txBody>
-      </p:sp>
-      <p:sp>
-        <p:nvSpPr>
-          <p:cNvPr id="77" name="Text 27"/>
-          <p:cNvSpPr/>
-          <p:nvPr/>
-        </p:nvSpPr>
-        <p:spPr>
-          <a:xfrm>
-            <a:off x="5461099" y="5086350"/>
-            <a:ext cx="609898" cy="152400"/>
-          </a:xfrm>
-          <a:prstGeom prst="rect">
-            <a:avLst/>
-          </a:prstGeom>
-          <a:noFill/>
-          <a:ln/>
-        </p:spPr>
-        <p:txBody>
-          <a:bodyPr vert="horz" wrap="square" lIns="0" tIns="0" rIns="0" bIns="0" rtlCol="0" anchor="t"/>
-          <a:lstStyle/>
-          <a:p>
-            <a:pPr marL="0" indent="0">
-              <a:lnSpc>
-                <a:spcPts val="1200"/>
-              </a:lnSpc>
-              <a:buNone/>
-            </a:pPr>
-            <a:r>
-              <a:rPr lang="en-US" sz="900" dirty="0">
-                <a:solidFill>
-                  <a:srgbClr val="4B5563"/>
-                </a:solidFill>
-                <a:latin typeface="Noto Sans KR" pitchFamily="34" charset="0"/>
-                <a:ea typeface="Noto Sans KR" pitchFamily="34" charset="-122"/>
-                <a:cs typeface="Noto Sans KR" pitchFamily="34" charset="-120"/>
-              </a:rPr>
-              <a:t>LightGBM</a:t>
+              <a:t>0.4</a:t>
             </a:r>
             <a:endParaRPr lang="en-US" sz="900" dirty="0"/>
           </a:p>
@@ -12403,217 +12223,7 @@
                 <a:ea typeface="Noto Sans KR" pitchFamily="34" charset="-122"/>
                 <a:cs typeface="Noto Sans KR" pitchFamily="34" charset="-120"/>
               </a:rPr>
-              <a:t>0.47</a:t>
-            </a:r>
-            <a:endParaRPr lang="en-US" sz="900" dirty="0"/>
-          </a:p>
-        </p:txBody>
-      </p:sp>
-      <p:sp>
-        <p:nvSpPr>
-          <p:cNvPr id="79" name="Text 29"/>
-          <p:cNvSpPr/>
-          <p:nvPr/>
-        </p:nvSpPr>
-        <p:spPr>
-          <a:xfrm>
-            <a:off x="6559004" y="5086350"/>
-            <a:ext cx="548997" cy="152400"/>
-          </a:xfrm>
-          <a:prstGeom prst="rect">
-            <a:avLst/>
-          </a:prstGeom>
-          <a:noFill/>
-          <a:ln/>
-        </p:spPr>
-        <p:txBody>
-          <a:bodyPr vert="horz" wrap="square" lIns="0" tIns="0" rIns="0" bIns="0" rtlCol="0" anchor="t"/>
-          <a:lstStyle/>
-          <a:p>
-            <a:pPr marL="0" indent="0">
-              <a:lnSpc>
-                <a:spcPts val="1200"/>
-              </a:lnSpc>
-              <a:buNone/>
-            </a:pPr>
-            <a:r>
-              <a:rPr lang="en-US" sz="900" dirty="0">
-                <a:solidFill>
-                  <a:srgbClr val="4B5563"/>
-                </a:solidFill>
-                <a:latin typeface="Noto Sans KR" pitchFamily="34" charset="0"/>
-                <a:ea typeface="Noto Sans KR" pitchFamily="34" charset="-122"/>
-                <a:cs typeface="Noto Sans KR" pitchFamily="34" charset="-120"/>
-              </a:rPr>
-              <a:t>XGBoost</a:t>
-            </a:r>
-            <a:endParaRPr lang="en-US" sz="900" dirty="0"/>
-          </a:p>
-        </p:txBody>
-      </p:sp>
-      <p:sp>
-        <p:nvSpPr>
-          <p:cNvPr id="80" name="Text 30"/>
-          <p:cNvSpPr/>
-          <p:nvPr/>
-        </p:nvSpPr>
-        <p:spPr>
-          <a:xfrm>
-            <a:off x="7612559" y="4895850"/>
-            <a:ext cx="457200" cy="152400"/>
-          </a:xfrm>
-          <a:prstGeom prst="rect">
-            <a:avLst/>
-          </a:prstGeom>
-          <a:noFill/>
-          <a:ln/>
-        </p:spPr>
-        <p:txBody>
-          <a:bodyPr vert="horz" wrap="square" lIns="0" tIns="0" rIns="0" bIns="0" rtlCol="0" anchor="t"/>
-          <a:lstStyle/>
-          <a:p>
-            <a:pPr marL="0" indent="0" algn="ctr">
-              <a:lnSpc>
-                <a:spcPts val="1200"/>
-              </a:lnSpc>
-              <a:buNone/>
-            </a:pPr>
-            <a:r>
-              <a:rPr lang="en-US" sz="900" dirty="0">
-                <a:solidFill>
-                  <a:srgbClr val="FFFFFF"/>
-                </a:solidFill>
-                <a:latin typeface="Noto Sans KR" pitchFamily="34" charset="0"/>
-                <a:ea typeface="Noto Sans KR" pitchFamily="34" charset="-122"/>
-                <a:cs typeface="Noto Sans KR" pitchFamily="34" charset="-120"/>
-              </a:rPr>
-              <a:t>0.48</a:t>
-            </a:r>
-            <a:endParaRPr lang="en-US" sz="900" dirty="0"/>
-          </a:p>
-        </p:txBody>
-      </p:sp>
-      <p:sp>
-        <p:nvSpPr>
-          <p:cNvPr id="81" name="Text 31"/>
-          <p:cNvSpPr/>
-          <p:nvPr/>
-        </p:nvSpPr>
-        <p:spPr>
-          <a:xfrm>
-            <a:off x="7606159" y="5086350"/>
-            <a:ext cx="564178" cy="152400"/>
-          </a:xfrm>
-          <a:prstGeom prst="rect">
-            <a:avLst/>
-          </a:prstGeom>
-          <a:noFill/>
-          <a:ln/>
-        </p:spPr>
-        <p:txBody>
-          <a:bodyPr vert="horz" wrap="square" lIns="0" tIns="0" rIns="0" bIns="0" rtlCol="0" anchor="t"/>
-          <a:lstStyle/>
-          <a:p>
-            <a:pPr marL="0" indent="0">
-              <a:lnSpc>
-                <a:spcPts val="1200"/>
-              </a:lnSpc>
-              <a:buNone/>
-            </a:pPr>
-            <a:r>
-              <a:rPr lang="en-US" sz="900" dirty="0">
-                <a:solidFill>
-                  <a:srgbClr val="4B5563"/>
-                </a:solidFill>
-                <a:latin typeface="Noto Sans KR" pitchFamily="34" charset="0"/>
-                <a:ea typeface="Noto Sans KR" pitchFamily="34" charset="-122"/>
-                <a:cs typeface="Noto Sans KR" pitchFamily="34" charset="-120"/>
-              </a:rPr>
-              <a:t>CatBoost</a:t>
-            </a:r>
-            <a:endParaRPr lang="en-US" sz="900" dirty="0"/>
-          </a:p>
-        </p:txBody>
-      </p:sp>
-      <p:sp>
-        <p:nvSpPr>
-          <p:cNvPr id="82" name="Text 32"/>
-          <p:cNvSpPr/>
-          <p:nvPr/>
-        </p:nvSpPr>
-        <p:spPr>
-          <a:xfrm>
-            <a:off x="8627864" y="4895850"/>
-            <a:ext cx="457200" cy="152400"/>
-          </a:xfrm>
-          <a:prstGeom prst="rect">
-            <a:avLst/>
-          </a:prstGeom>
-          <a:noFill/>
-          <a:ln/>
-        </p:spPr>
-        <p:txBody>
-          <a:bodyPr vert="horz" wrap="square" lIns="0" tIns="0" rIns="0" bIns="0" rtlCol="0" anchor="t"/>
-          <a:lstStyle/>
-          <a:p>
-            <a:pPr marL="0" indent="0" algn="ctr">
-              <a:lnSpc>
-                <a:spcPts val="1200"/>
-              </a:lnSpc>
-              <a:buNone/>
-            </a:pPr>
-            <a:r>
-              <a:rPr lang="en-US" sz="900" dirty="0">
-                <a:solidFill>
-                  <a:srgbClr val="FFFFFF"/>
-                </a:solidFill>
-                <a:latin typeface="Noto Sans KR" pitchFamily="34" charset="0"/>
-                <a:ea typeface="Noto Sans KR" pitchFamily="34" charset="-122"/>
-                <a:cs typeface="Noto Sans KR" pitchFamily="34" charset="-120"/>
-              </a:rPr>
-              <a:t>0.50</a:t>
-            </a:r>
-            <a:endParaRPr lang="en-US" sz="900" dirty="0"/>
-          </a:p>
-        </p:txBody>
-      </p:sp>
-      <p:sp>
-        <p:nvSpPr>
-          <p:cNvPr id="83" name="Text 33"/>
-          <p:cNvSpPr/>
-          <p:nvPr/>
-        </p:nvSpPr>
-        <p:spPr>
-          <a:xfrm>
-            <a:off x="8707041" y="5086350"/>
-            <a:ext cx="358438" cy="152400"/>
-          </a:xfrm>
-          <a:prstGeom prst="rect">
-            <a:avLst/>
-          </a:prstGeom>
-          <a:noFill/>
-          <a:ln/>
-        </p:spPr>
-        <p:txBody>
-          <a:bodyPr vert="horz" wrap="square" lIns="0" tIns="0" rIns="0" bIns="0" rtlCol="0" anchor="t"/>
-          <a:lstStyle/>
-          <a:p>
-            <a:pPr marL="0" indent="0">
-              <a:lnSpc>
-                <a:spcPts val="1200"/>
-              </a:lnSpc>
-              <a:buNone/>
-            </a:pPr>
-            <a:r>
-              <a:rPr lang="en-US" sz="900" dirty="0">
-                <a:solidFill>
-                  <a:srgbClr val="4B5563"/>
-                </a:solidFill>
-                <a:latin typeface="Noto Sans KR" pitchFamily="34" charset="0"/>
-                <a:ea typeface="Noto Sans KR" pitchFamily="34" charset="-122"/>
-                <a:cs typeface="Noto Sans KR" pitchFamily="34" charset="-120"/>
-              </a:rPr>
-              <a:t>Ridge</a:t>
+              <a:t>047</a:t>
             </a:r>
             <a:endParaRPr lang="en-US" sz="900" dirty="0"/>
           </a:p>
@@ -13375,6 +12985,685 @@
           </a:p>
         </p:txBody>
       </p:sp>
+      <p:pic>
+        <p:nvPicPr>
+          <p:cNvPr id="103" name="Image 15" descr="preencoded.png">
+            <a:extLst>
+              <a:ext uri="{FF2B5EF4-FFF2-40B4-BE49-F238E27FC236}">
+                <a16:creationId xmlns:a16="http://schemas.microsoft.com/office/drawing/2014/main" id="{7DBFCAEF-FCBB-7ADE-66C7-9DCB060AB54A}"/>
+              </a:ext>
+            </a:extLst>
+          </p:cNvPr>
+          <p:cNvPicPr>
+            <a:picLocks noChangeAspect="1"/>
+          </p:cNvPicPr>
+          <p:nvPr/>
+        </p:nvPicPr>
+        <p:blipFill>
+          <a:blip r:embed="rId18"/>
+          <a:stretch>
+            <a:fillRect/>
+          </a:stretch>
+        </p:blipFill>
+        <p:spPr>
+          <a:xfrm>
+            <a:off x="5166271" y="3905250"/>
+            <a:ext cx="4175671" cy="1854777"/>
+          </a:xfrm>
+          <a:prstGeom prst="rect">
+            <a:avLst/>
+          </a:prstGeom>
+        </p:spPr>
+      </p:pic>
+      <p:graphicFrame>
+        <p:nvGraphicFramePr>
+          <p:cNvPr id="102" name="표 101">
+            <a:extLst>
+              <a:ext uri="{FF2B5EF4-FFF2-40B4-BE49-F238E27FC236}">
+                <a16:creationId xmlns:a16="http://schemas.microsoft.com/office/drawing/2014/main" id="{6F0484D6-8C11-A23E-B99C-01F426E3AA89}"/>
+              </a:ext>
+            </a:extLst>
+          </p:cNvPr>
+          <p:cNvGraphicFramePr>
+            <a:graphicFrameLocks noGrp="1"/>
+          </p:cNvGraphicFramePr>
+          <p:nvPr>
+            <p:extLst>
+              <p:ext uri="{D42A27DB-BD31-4B8C-83A1-F6EECF244321}">
+                <p14:modId xmlns:p14="http://schemas.microsoft.com/office/powerpoint/2010/main" val="209126996"/>
+              </p:ext>
+            </p:extLst>
+          </p:nvPr>
+        </p:nvGraphicFramePr>
+        <p:xfrm>
+          <a:off x="5253611" y="4000500"/>
+          <a:ext cx="4055862" cy="1651716"/>
+        </p:xfrm>
+        <a:graphic>
+          <a:graphicData uri="http://schemas.openxmlformats.org/drawingml/2006/table">
+            <a:tbl>
+              <a:tblPr/>
+              <a:tblGrid>
+                <a:gridCol w="1351954">
+                  <a:extLst>
+                    <a:ext uri="{9D8B030D-6E8A-4147-A177-3AD203B41FA5}">
+                      <a16:colId xmlns:a16="http://schemas.microsoft.com/office/drawing/2014/main" val="1901845108"/>
+                    </a:ext>
+                  </a:extLst>
+                </a:gridCol>
+                <a:gridCol w="1351954">
+                  <a:extLst>
+                    <a:ext uri="{9D8B030D-6E8A-4147-A177-3AD203B41FA5}">
+                      <a16:colId xmlns:a16="http://schemas.microsoft.com/office/drawing/2014/main" val="49759352"/>
+                    </a:ext>
+                  </a:extLst>
+                </a:gridCol>
+                <a:gridCol w="1351954">
+                  <a:extLst>
+                    <a:ext uri="{9D8B030D-6E8A-4147-A177-3AD203B41FA5}">
+                      <a16:colId xmlns:a16="http://schemas.microsoft.com/office/drawing/2014/main" val="3508149937"/>
+                    </a:ext>
+                  </a:extLst>
+                </a:gridCol>
+              </a:tblGrid>
+              <a:tr h="176965">
+                <a:tc>
+                  <a:txBody>
+                    <a:bodyPr/>
+                    <a:lstStyle/>
+                    <a:p>
+                      <a:pPr>
+                        <a:buNone/>
+                      </a:pPr>
+                      <a:r>
+                        <a:rPr lang="ko-KR" altLang="en-US" sz="900">
+                          <a:latin typeface="Noto Sans KR" panose="020B0200000000000000" pitchFamily="50" charset="-127"/>
+                          <a:ea typeface="Noto Sans KR" panose="020B0200000000000000" pitchFamily="50" charset="-127"/>
+                        </a:rPr>
+                        <a:t>지표</a:t>
+                      </a:r>
+                    </a:p>
+                  </a:txBody>
+                  <a:tcPr anchor="ctr">
+                    <a:lnL>
+                      <a:noFill/>
+                    </a:lnL>
+                    <a:lnR>
+                      <a:noFill/>
+                    </a:lnR>
+                    <a:lnT>
+                      <a:noFill/>
+                    </a:lnT>
+                    <a:lnB>
+                      <a:noFill/>
+                    </a:lnB>
+                    <a:noFill/>
+                  </a:tcPr>
+                </a:tc>
+                <a:tc>
+                  <a:txBody>
+                    <a:bodyPr/>
+                    <a:lstStyle/>
+                    <a:p>
+                      <a:pPr>
+                        <a:buNone/>
+                      </a:pPr>
+                      <a:r>
+                        <a:rPr lang="ko-KR" altLang="en-US" sz="900">
+                          <a:latin typeface="Noto Sans KR" panose="020B0200000000000000" pitchFamily="50" charset="-127"/>
+                          <a:ea typeface="Noto Sans KR" panose="020B0200000000000000" pitchFamily="50" charset="-127"/>
+                        </a:rPr>
+                        <a:t>의미</a:t>
+                      </a:r>
+                    </a:p>
+                  </a:txBody>
+                  <a:tcPr anchor="ctr">
+                    <a:lnL>
+                      <a:noFill/>
+                    </a:lnL>
+                    <a:lnR>
+                      <a:noFill/>
+                    </a:lnR>
+                    <a:lnT>
+                      <a:noFill/>
+                    </a:lnT>
+                    <a:lnB>
+                      <a:noFill/>
+                    </a:lnB>
+                    <a:noFill/>
+                  </a:tcPr>
+                </a:tc>
+                <a:tc>
+                  <a:txBody>
+                    <a:bodyPr/>
+                    <a:lstStyle/>
+                    <a:p>
+                      <a:pPr>
+                        <a:buNone/>
+                      </a:pPr>
+                      <a:r>
+                        <a:rPr lang="ko-KR" altLang="en-US" sz="900">
+                          <a:latin typeface="Noto Sans KR" panose="020B0200000000000000" pitchFamily="50" charset="-127"/>
+                          <a:ea typeface="Noto Sans KR" panose="020B0200000000000000" pitchFamily="50" charset="-127"/>
+                        </a:rPr>
+                        <a:t>해석</a:t>
+                      </a:r>
+                    </a:p>
+                  </a:txBody>
+                  <a:tcPr anchor="ctr">
+                    <a:lnL>
+                      <a:noFill/>
+                    </a:lnL>
+                    <a:lnR>
+                      <a:noFill/>
+                    </a:lnR>
+                    <a:lnT>
+                      <a:noFill/>
+                    </a:lnT>
+                    <a:lnB>
+                      <a:noFill/>
+                    </a:lnB>
+                    <a:noFill/>
+                  </a:tcPr>
+                </a:tc>
+                <a:extLst>
+                  <a:ext uri="{0D108BD9-81ED-4DB2-BD59-A6C34878D82A}">
+                    <a16:rowId xmlns:a16="http://schemas.microsoft.com/office/drawing/2014/main" val="1675236389"/>
+                  </a:ext>
+                </a:extLst>
+              </a:tr>
+              <a:tr h="442413">
+                <a:tc>
+                  <a:txBody>
+                    <a:bodyPr/>
+                    <a:lstStyle/>
+                    <a:p>
+                      <a:pPr>
+                        <a:buNone/>
+                      </a:pPr>
+                      <a:r>
+                        <a:rPr lang="en-US" sz="900" dirty="0">
+                          <a:latin typeface="Noto Sans KR" panose="020B0200000000000000" pitchFamily="50" charset="-127"/>
+                          <a:ea typeface="Noto Sans KR" panose="020B0200000000000000" pitchFamily="50" charset="-127"/>
+                        </a:rPr>
+                        <a:t>RMSLE</a:t>
+                      </a:r>
+                    </a:p>
+                  </a:txBody>
+                  <a:tcPr anchor="ctr">
+                    <a:lnL>
+                      <a:noFill/>
+                    </a:lnL>
+                    <a:lnR>
+                      <a:noFill/>
+                    </a:lnR>
+                    <a:lnT>
+                      <a:noFill/>
+                    </a:lnT>
+                    <a:lnB>
+                      <a:noFill/>
+                    </a:lnB>
+                    <a:noFill/>
+                  </a:tcPr>
+                </a:tc>
+                <a:tc>
+                  <a:txBody>
+                    <a:bodyPr/>
+                    <a:lstStyle/>
+                    <a:p>
+                      <a:pPr>
+                        <a:buNone/>
+                      </a:pPr>
+                      <a:r>
+                        <a:rPr lang="ko-KR" altLang="en-US" sz="900" dirty="0">
+                          <a:latin typeface="Noto Sans KR" panose="020B0200000000000000" pitchFamily="50" charset="-127"/>
+                          <a:ea typeface="Noto Sans KR" panose="020B0200000000000000" pitchFamily="50" charset="-127"/>
+                        </a:rPr>
+                        <a:t>로그 변환된 </a:t>
+                      </a:r>
+                      <a:r>
+                        <a:rPr lang="ko-KR" altLang="en-US" sz="900" dirty="0" err="1">
+                          <a:latin typeface="Noto Sans KR" panose="020B0200000000000000" pitchFamily="50" charset="-127"/>
+                          <a:ea typeface="Noto Sans KR" panose="020B0200000000000000" pitchFamily="50" charset="-127"/>
+                        </a:rPr>
+                        <a:t>예측값과</a:t>
+                      </a:r>
+                      <a:r>
+                        <a:rPr lang="ko-KR" altLang="en-US" sz="900" dirty="0">
+                          <a:latin typeface="Noto Sans KR" panose="020B0200000000000000" pitchFamily="50" charset="-127"/>
+                          <a:ea typeface="Noto Sans KR" panose="020B0200000000000000" pitchFamily="50" charset="-127"/>
+                        </a:rPr>
+                        <a:t> </a:t>
+                      </a:r>
+                      <a:r>
+                        <a:rPr lang="ko-KR" altLang="en-US" sz="900" dirty="0" err="1">
+                          <a:latin typeface="Noto Sans KR" panose="020B0200000000000000" pitchFamily="50" charset="-127"/>
+                          <a:ea typeface="Noto Sans KR" panose="020B0200000000000000" pitchFamily="50" charset="-127"/>
+                        </a:rPr>
+                        <a:t>실제값의</a:t>
+                      </a:r>
+                      <a:r>
+                        <a:rPr lang="ko-KR" altLang="en-US" sz="900" dirty="0">
+                          <a:latin typeface="Noto Sans KR" panose="020B0200000000000000" pitchFamily="50" charset="-127"/>
+                          <a:ea typeface="Noto Sans KR" panose="020B0200000000000000" pitchFamily="50" charset="-127"/>
+                        </a:rPr>
+                        <a:t> 차이</a:t>
+                      </a:r>
+                    </a:p>
+                  </a:txBody>
+                  <a:tcPr anchor="ctr">
+                    <a:lnL>
+                      <a:noFill/>
+                    </a:lnL>
+                    <a:lnR>
+                      <a:noFill/>
+                    </a:lnR>
+                    <a:lnT>
+                      <a:noFill/>
+                    </a:lnT>
+                    <a:lnB>
+                      <a:noFill/>
+                    </a:lnB>
+                    <a:noFill/>
+                  </a:tcPr>
+                </a:tc>
+                <a:tc>
+                  <a:txBody>
+                    <a:bodyPr/>
+                    <a:lstStyle/>
+                    <a:p>
+                      <a:pPr>
+                        <a:buNone/>
+                      </a:pPr>
+                      <a:r>
+                        <a:rPr lang="ko-KR" altLang="en-US" sz="900" b="1">
+                          <a:latin typeface="Noto Sans KR" panose="020B0200000000000000" pitchFamily="50" charset="-127"/>
+                          <a:ea typeface="Noto Sans KR" panose="020B0200000000000000" pitchFamily="50" charset="-127"/>
+                        </a:rPr>
+                        <a:t>낮을수록 좋음</a:t>
+                      </a:r>
+                      <a:endParaRPr lang="ko-KR" altLang="en-US" sz="900">
+                        <a:latin typeface="Noto Sans KR" panose="020B0200000000000000" pitchFamily="50" charset="-127"/>
+                        <a:ea typeface="Noto Sans KR" panose="020B0200000000000000" pitchFamily="50" charset="-127"/>
+                      </a:endParaRPr>
+                    </a:p>
+                  </a:txBody>
+                  <a:tcPr anchor="ctr">
+                    <a:lnL>
+                      <a:noFill/>
+                    </a:lnL>
+                    <a:lnR>
+                      <a:noFill/>
+                    </a:lnR>
+                    <a:lnT>
+                      <a:noFill/>
+                    </a:lnT>
+                    <a:lnB>
+                      <a:noFill/>
+                    </a:lnB>
+                    <a:noFill/>
+                  </a:tcPr>
+                </a:tc>
+                <a:extLst>
+                  <a:ext uri="{0D108BD9-81ED-4DB2-BD59-A6C34878D82A}">
+                    <a16:rowId xmlns:a16="http://schemas.microsoft.com/office/drawing/2014/main" val="1168013692"/>
+                  </a:ext>
+                </a:extLst>
+              </a:tr>
+              <a:tr h="442413">
+                <a:tc>
+                  <a:txBody>
+                    <a:bodyPr/>
+                    <a:lstStyle/>
+                    <a:p>
+                      <a:pPr>
+                        <a:buNone/>
+                      </a:pPr>
+                      <a:r>
+                        <a:rPr lang="en-US" sz="900">
+                          <a:latin typeface="Noto Sans KR" panose="020B0200000000000000" pitchFamily="50" charset="-127"/>
+                          <a:ea typeface="Noto Sans KR" panose="020B0200000000000000" pitchFamily="50" charset="-127"/>
+                        </a:rPr>
+                        <a:t>RMSE</a:t>
+                      </a:r>
+                    </a:p>
+                  </a:txBody>
+                  <a:tcPr anchor="ctr">
+                    <a:lnL>
+                      <a:noFill/>
+                    </a:lnL>
+                    <a:lnR>
+                      <a:noFill/>
+                    </a:lnR>
+                    <a:lnT>
+                      <a:noFill/>
+                    </a:lnT>
+                    <a:lnB>
+                      <a:noFill/>
+                    </a:lnB>
+                    <a:noFill/>
+                  </a:tcPr>
+                </a:tc>
+                <a:tc>
+                  <a:txBody>
+                    <a:bodyPr/>
+                    <a:lstStyle/>
+                    <a:p>
+                      <a:pPr>
+                        <a:buNone/>
+                      </a:pPr>
+                      <a:r>
+                        <a:rPr lang="ko-KR" altLang="en-US" sz="900">
+                          <a:latin typeface="Noto Sans KR" panose="020B0200000000000000" pitchFamily="50" charset="-127"/>
+                          <a:ea typeface="Noto Sans KR" panose="020B0200000000000000" pitchFamily="50" charset="-127"/>
+                        </a:rPr>
+                        <a:t>평균 제곱 오차의 제곱근 </a:t>
+                      </a:r>
+                      <a:r>
+                        <a:rPr lang="en-US" altLang="ko-KR" sz="900">
+                          <a:latin typeface="Noto Sans KR" panose="020B0200000000000000" pitchFamily="50" charset="-127"/>
+                          <a:ea typeface="Noto Sans KR" panose="020B0200000000000000" pitchFamily="50" charset="-127"/>
+                        </a:rPr>
+                        <a:t>(</a:t>
+                      </a:r>
+                      <a:r>
+                        <a:rPr lang="ko-KR" altLang="en-US" sz="900">
+                          <a:latin typeface="Noto Sans KR" panose="020B0200000000000000" pitchFamily="50" charset="-127"/>
+                          <a:ea typeface="Noto Sans KR" panose="020B0200000000000000" pitchFamily="50" charset="-127"/>
+                        </a:rPr>
+                        <a:t>큰 오차 민감</a:t>
+                      </a:r>
+                      <a:r>
+                        <a:rPr lang="en-US" altLang="ko-KR" sz="900">
+                          <a:latin typeface="Noto Sans KR" panose="020B0200000000000000" pitchFamily="50" charset="-127"/>
+                          <a:ea typeface="Noto Sans KR" panose="020B0200000000000000" pitchFamily="50" charset="-127"/>
+                        </a:rPr>
+                        <a:t>)</a:t>
+                      </a:r>
+                    </a:p>
+                  </a:txBody>
+                  <a:tcPr anchor="ctr">
+                    <a:lnL>
+                      <a:noFill/>
+                    </a:lnL>
+                    <a:lnR>
+                      <a:noFill/>
+                    </a:lnR>
+                    <a:lnT>
+                      <a:noFill/>
+                    </a:lnT>
+                    <a:lnB>
+                      <a:noFill/>
+                    </a:lnB>
+                    <a:noFill/>
+                  </a:tcPr>
+                </a:tc>
+                <a:tc>
+                  <a:txBody>
+                    <a:bodyPr/>
+                    <a:lstStyle/>
+                    <a:p>
+                      <a:pPr>
+                        <a:buNone/>
+                      </a:pPr>
+                      <a:r>
+                        <a:rPr lang="ko-KR" altLang="en-US" sz="900">
+                          <a:latin typeface="Noto Sans KR" panose="020B0200000000000000" pitchFamily="50" charset="-127"/>
+                          <a:ea typeface="Noto Sans KR" panose="020B0200000000000000" pitchFamily="50" charset="-127"/>
+                        </a:rPr>
+                        <a:t>낮을수록 좋음</a:t>
+                      </a:r>
+                    </a:p>
+                  </a:txBody>
+                  <a:tcPr anchor="ctr">
+                    <a:lnL>
+                      <a:noFill/>
+                    </a:lnL>
+                    <a:lnR>
+                      <a:noFill/>
+                    </a:lnR>
+                    <a:lnT>
+                      <a:noFill/>
+                    </a:lnT>
+                    <a:lnB>
+                      <a:noFill/>
+                    </a:lnB>
+                    <a:noFill/>
+                  </a:tcPr>
+                </a:tc>
+                <a:extLst>
+                  <a:ext uri="{0D108BD9-81ED-4DB2-BD59-A6C34878D82A}">
+                    <a16:rowId xmlns:a16="http://schemas.microsoft.com/office/drawing/2014/main" val="2154353249"/>
+                  </a:ext>
+                </a:extLst>
+              </a:tr>
+              <a:tr h="176965">
+                <a:tc>
+                  <a:txBody>
+                    <a:bodyPr/>
+                    <a:lstStyle/>
+                    <a:p>
+                      <a:pPr>
+                        <a:buNone/>
+                      </a:pPr>
+                      <a:r>
+                        <a:rPr lang="en-US" sz="900">
+                          <a:latin typeface="Noto Sans KR" panose="020B0200000000000000" pitchFamily="50" charset="-127"/>
+                          <a:ea typeface="Noto Sans KR" panose="020B0200000000000000" pitchFamily="50" charset="-127"/>
+                        </a:rPr>
+                        <a:t>MAE</a:t>
+                      </a:r>
+                    </a:p>
+                  </a:txBody>
+                  <a:tcPr anchor="ctr">
+                    <a:lnL>
+                      <a:noFill/>
+                    </a:lnL>
+                    <a:lnR>
+                      <a:noFill/>
+                    </a:lnR>
+                    <a:lnT>
+                      <a:noFill/>
+                    </a:lnT>
+                    <a:lnB>
+                      <a:noFill/>
+                    </a:lnB>
+                    <a:noFill/>
+                  </a:tcPr>
+                </a:tc>
+                <a:tc>
+                  <a:txBody>
+                    <a:bodyPr/>
+                    <a:lstStyle/>
+                    <a:p>
+                      <a:pPr>
+                        <a:buNone/>
+                      </a:pPr>
+                      <a:r>
+                        <a:rPr lang="ko-KR" altLang="en-US" sz="900">
+                          <a:latin typeface="Noto Sans KR" panose="020B0200000000000000" pitchFamily="50" charset="-127"/>
+                          <a:ea typeface="Noto Sans KR" panose="020B0200000000000000" pitchFamily="50" charset="-127"/>
+                        </a:rPr>
+                        <a:t>평균 절대 오차</a:t>
+                      </a:r>
+                    </a:p>
+                  </a:txBody>
+                  <a:tcPr anchor="ctr">
+                    <a:lnL>
+                      <a:noFill/>
+                    </a:lnL>
+                    <a:lnR>
+                      <a:noFill/>
+                    </a:lnR>
+                    <a:lnT>
+                      <a:noFill/>
+                    </a:lnT>
+                    <a:lnB>
+                      <a:noFill/>
+                    </a:lnB>
+                    <a:noFill/>
+                  </a:tcPr>
+                </a:tc>
+                <a:tc>
+                  <a:txBody>
+                    <a:bodyPr/>
+                    <a:lstStyle/>
+                    <a:p>
+                      <a:pPr>
+                        <a:buNone/>
+                      </a:pPr>
+                      <a:r>
+                        <a:rPr lang="ko-KR" altLang="en-US" sz="900">
+                          <a:latin typeface="Noto Sans KR" panose="020B0200000000000000" pitchFamily="50" charset="-127"/>
+                          <a:ea typeface="Noto Sans KR" panose="020B0200000000000000" pitchFamily="50" charset="-127"/>
+                        </a:rPr>
+                        <a:t>낮을수록 좋음</a:t>
+                      </a:r>
+                    </a:p>
+                  </a:txBody>
+                  <a:tcPr anchor="ctr">
+                    <a:lnL>
+                      <a:noFill/>
+                    </a:lnL>
+                    <a:lnR>
+                      <a:noFill/>
+                    </a:lnR>
+                    <a:lnT>
+                      <a:noFill/>
+                    </a:lnT>
+                    <a:lnB>
+                      <a:noFill/>
+                    </a:lnB>
+                    <a:noFill/>
+                  </a:tcPr>
+                </a:tc>
+                <a:extLst>
+                  <a:ext uri="{0D108BD9-81ED-4DB2-BD59-A6C34878D82A}">
+                    <a16:rowId xmlns:a16="http://schemas.microsoft.com/office/drawing/2014/main" val="3731455351"/>
+                  </a:ext>
+                </a:extLst>
+              </a:tr>
+              <a:tr h="309690">
+                <a:tc>
+                  <a:txBody>
+                    <a:bodyPr/>
+                    <a:lstStyle/>
+                    <a:p>
+                      <a:pPr>
+                        <a:buNone/>
+                      </a:pPr>
+                      <a:r>
+                        <a:rPr lang="en-US" sz="900">
+                          <a:latin typeface="Noto Sans KR" panose="020B0200000000000000" pitchFamily="50" charset="-127"/>
+                          <a:ea typeface="Noto Sans KR" panose="020B0200000000000000" pitchFamily="50" charset="-127"/>
+                        </a:rPr>
+                        <a:t>R²</a:t>
+                      </a:r>
+                    </a:p>
+                  </a:txBody>
+                  <a:tcPr anchor="ctr">
+                    <a:lnL>
+                      <a:noFill/>
+                    </a:lnL>
+                    <a:lnR>
+                      <a:noFill/>
+                    </a:lnR>
+                    <a:lnT>
+                      <a:noFill/>
+                    </a:lnT>
+                    <a:lnB>
+                      <a:noFill/>
+                    </a:lnB>
+                    <a:noFill/>
+                  </a:tcPr>
+                </a:tc>
+                <a:tc>
+                  <a:txBody>
+                    <a:bodyPr/>
+                    <a:lstStyle/>
+                    <a:p>
+                      <a:pPr>
+                        <a:buNone/>
+                      </a:pPr>
+                      <a:r>
+                        <a:rPr lang="ko-KR" altLang="en-US" sz="900">
+                          <a:latin typeface="Noto Sans KR" panose="020B0200000000000000" pitchFamily="50" charset="-127"/>
+                          <a:ea typeface="Noto Sans KR" panose="020B0200000000000000" pitchFamily="50" charset="-127"/>
+                        </a:rPr>
+                        <a:t>분산 설명력</a:t>
+                      </a:r>
+                    </a:p>
+                  </a:txBody>
+                  <a:tcPr anchor="ctr">
+                    <a:lnL>
+                      <a:noFill/>
+                    </a:lnL>
+                    <a:lnR>
+                      <a:noFill/>
+                    </a:lnR>
+                    <a:lnT>
+                      <a:noFill/>
+                    </a:lnT>
+                    <a:lnB>
+                      <a:noFill/>
+                    </a:lnB>
+                    <a:noFill/>
+                  </a:tcPr>
+                </a:tc>
+                <a:tc>
+                  <a:txBody>
+                    <a:bodyPr/>
+                    <a:lstStyle/>
+                    <a:p>
+                      <a:pPr>
+                        <a:buNone/>
+                      </a:pPr>
+                      <a:r>
+                        <a:rPr lang="en-US" altLang="ko-KR" sz="900" b="1" dirty="0">
+                          <a:latin typeface="Noto Sans KR" panose="020B0200000000000000" pitchFamily="50" charset="-127"/>
+                          <a:ea typeface="Noto Sans KR" panose="020B0200000000000000" pitchFamily="50" charset="-127"/>
+                        </a:rPr>
+                        <a:t>1</a:t>
+                      </a:r>
+                      <a:r>
+                        <a:rPr lang="ko-KR" altLang="en-US" sz="900" b="1" dirty="0">
+                          <a:latin typeface="Noto Sans KR" panose="020B0200000000000000" pitchFamily="50" charset="-127"/>
+                          <a:ea typeface="Noto Sans KR" panose="020B0200000000000000" pitchFamily="50" charset="-127"/>
+                        </a:rPr>
+                        <a:t>에 가까울수록 좋음</a:t>
+                      </a:r>
+                      <a:endParaRPr lang="ko-KR" altLang="en-US" sz="900" dirty="0">
+                        <a:latin typeface="Noto Sans KR" panose="020B0200000000000000" pitchFamily="50" charset="-127"/>
+                        <a:ea typeface="Noto Sans KR" panose="020B0200000000000000" pitchFamily="50" charset="-127"/>
+                      </a:endParaRPr>
+                    </a:p>
+                  </a:txBody>
+                  <a:tcPr anchor="ctr">
+                    <a:lnL>
+                      <a:noFill/>
+                    </a:lnL>
+                    <a:lnR>
+                      <a:noFill/>
+                    </a:lnR>
+                    <a:lnT>
+                      <a:noFill/>
+                    </a:lnT>
+                    <a:lnB>
+                      <a:noFill/>
+                    </a:lnB>
+                    <a:noFill/>
+                  </a:tcPr>
+                </a:tc>
+                <a:extLst>
+                  <a:ext uri="{0D108BD9-81ED-4DB2-BD59-A6C34878D82A}">
+                    <a16:rowId xmlns:a16="http://schemas.microsoft.com/office/drawing/2014/main" val="585119306"/>
+                  </a:ext>
+                </a:extLst>
+              </a:tr>
+            </a:tbl>
+          </a:graphicData>
+        </a:graphic>
+      </p:graphicFrame>
     </p:spTree>
   </p:cSld>
   <p:clrMapOvr>
